--- a/files/teaching-resources/concordiacollege-busn-301/busn-301-lecture-note/busn301-ch20.pptx
+++ b/files/teaching-resources/concordiacollege-busn-301/busn-301-lecture-note/busn301-ch20.pptx
@@ -235,7 +235,7 @@
           <a:p>
             <a:fld id="{2D359EC7-19C7-4638-A61A-0E2B59861576}" type="datetimeFigureOut">
               <a:rPr lang="en-US" smtClean="0"/>
-              <a:t>3/16/2026</a:t>
+              <a:t>3/29/2026</a:t>
             </a:fld>
             <a:endParaRPr lang="en-US"/>
           </a:p>
@@ -927,7 +927,7 @@
           <a:p>
             <a:fld id="{7968114D-31B9-4B78-9ACC-70FB90027BFD}" type="datetime1">
               <a:rPr lang="en-US" smtClean="0"/>
-              <a:t>3/16/2026</a:t>
+              <a:t>3/29/2026</a:t>
             </a:fld>
             <a:endParaRPr lang="en-US"/>
           </a:p>
@@ -1098,7 +1098,7 @@
           <a:p>
             <a:fld id="{873F4A91-75B0-4800-B4E2-20956DB94300}" type="datetime1">
               <a:rPr lang="en-US" smtClean="0"/>
-              <a:t>3/16/2026</a:t>
+              <a:t>3/29/2026</a:t>
             </a:fld>
             <a:endParaRPr lang="en-US"/>
           </a:p>
@@ -1279,7 +1279,7 @@
           <a:p>
             <a:fld id="{0F651350-1A97-42BE-B68B-7AD85E4EDCBF}" type="datetime1">
               <a:rPr lang="en-US" smtClean="0"/>
-              <a:t>3/16/2026</a:t>
+              <a:t>3/29/2026</a:t>
             </a:fld>
             <a:endParaRPr lang="en-US"/>
           </a:p>
@@ -1450,7 +1450,7 @@
           <a:p>
             <a:fld id="{CE41F65B-C187-4F2E-97E4-866F44D3FEC5}" type="datetime1">
               <a:rPr lang="en-US" smtClean="0"/>
-              <a:t>3/16/2026</a:t>
+              <a:t>3/29/2026</a:t>
             </a:fld>
             <a:endParaRPr lang="en-US"/>
           </a:p>
@@ -1698,7 +1698,7 @@
           <a:p>
             <a:fld id="{5B30CE8C-B3D2-4FED-8171-A22B1E84AA49}" type="datetime1">
               <a:rPr lang="en-US" smtClean="0"/>
-              <a:t>3/16/2026</a:t>
+              <a:t>3/29/2026</a:t>
             </a:fld>
             <a:endParaRPr lang="en-US"/>
           </a:p>
@@ -1986,7 +1986,7 @@
           <a:p>
             <a:fld id="{18787D79-C197-49E5-840E-62EF773E40EB}" type="datetime1">
               <a:rPr lang="en-US" smtClean="0"/>
-              <a:t>3/16/2026</a:t>
+              <a:t>3/29/2026</a:t>
             </a:fld>
             <a:endParaRPr lang="en-US"/>
           </a:p>
@@ -2408,7 +2408,7 @@
           <a:p>
             <a:fld id="{6AB4C717-ACD6-42B4-B4D2-A00897526083}" type="datetime1">
               <a:rPr lang="en-US" smtClean="0"/>
-              <a:t>3/16/2026</a:t>
+              <a:t>3/29/2026</a:t>
             </a:fld>
             <a:endParaRPr lang="en-US"/>
           </a:p>
@@ -2528,7 +2528,7 @@
           <a:p>
             <a:fld id="{35F0F010-C38E-44B3-A11D-B9CE0300A741}" type="datetime1">
               <a:rPr lang="en-US" smtClean="0"/>
-              <a:t>3/16/2026</a:t>
+              <a:t>3/29/2026</a:t>
             </a:fld>
             <a:endParaRPr lang="en-US"/>
           </a:p>
@@ -2626,7 +2626,7 @@
           <a:p>
             <a:fld id="{0E2442EE-45D9-4220-A88F-EE689B9875C3}" type="datetime1">
               <a:rPr lang="en-US" smtClean="0"/>
-              <a:t>3/16/2026</a:t>
+              <a:t>3/29/2026</a:t>
             </a:fld>
             <a:endParaRPr lang="en-US"/>
           </a:p>
@@ -2904,7 +2904,7 @@
           <a:p>
             <a:fld id="{D5FA1C2B-1683-45DB-88D6-369C6CB6AB24}" type="datetime1">
               <a:rPr lang="en-US" smtClean="0"/>
-              <a:t>3/16/2026</a:t>
+              <a:t>3/29/2026</a:t>
             </a:fld>
             <a:endParaRPr lang="en-US"/>
           </a:p>
@@ -3159,7 +3159,7 @@
           <a:p>
             <a:fld id="{DFFB611B-DC9D-42DB-B865-14DB93E316AF}" type="datetime1">
               <a:rPr lang="en-US" smtClean="0"/>
-              <a:t>3/16/2026</a:t>
+              <a:t>3/29/2026</a:t>
             </a:fld>
             <a:endParaRPr lang="en-US"/>
           </a:p>
@@ -3373,7 +3373,7 @@
           <a:p>
             <a:fld id="{A3B8D4B9-4EE2-4C3D-B367-BE7622E78789}" type="datetime1">
               <a:rPr lang="en-US" smtClean="0"/>
-              <a:t>3/16/2026</a:t>
+              <a:t>3/29/2026</a:t>
             </a:fld>
             <a:endParaRPr lang="en-US"/>
           </a:p>
@@ -3887,8 +3887,8 @@
           <a:chExt cx="0" cy="0"/>
         </a:xfrm>
       </p:grpSpPr>
-      <mc:AlternateContent xmlns:mc="http://schemas.openxmlformats.org/markup-compatibility/2006" xmlns:a14="http://schemas.microsoft.com/office/drawing/2010/main">
-        <mc:Choice Requires="a14">
+      <mc:AlternateContent xmlns:mc="http://schemas.openxmlformats.org/markup-compatibility/2006">
+        <mc:Choice xmlns:a14="http://schemas.microsoft.com/office/drawing/2010/main" Requires="a14">
           <p:sp>
             <p:nvSpPr>
               <p:cNvPr id="3" name="Content Placeholder 2">
@@ -3941,13 +3941,8 @@
                 </a:r>
                 <a:r>
                   <a:rPr lang="en-US" altLang="zh-TW" sz="2400" dirty="0"/>
-                  <a:t> curve shows all input-output combinations that yield the same level </a:t>
+                  <a:t> curve shows all input-output combinations that yield the same level of profit:</a:t>
                 </a:r>
-                <a:r>
-                  <a:rPr lang="en-US" altLang="zh-TW" sz="2400"/>
-                  <a:t>of profit:</a:t>
-                </a:r>
-                <a:endParaRPr lang="en-US" altLang="zh-TW" sz="2400" dirty="0"/>
               </a:p>
               <a:p>
                 <a:pPr>
@@ -4034,10 +4029,10 @@
                       </m:sSubPr>
                       <m:e>
                         <m:r>
-                          <a:rPr lang="en-US" altLang="zh-TW" sz="2400" i="1" dirty="0">
-                            <a:latin typeface="Cambria Math" panose="02040503050406030204" pitchFamily="18" charset="0"/>
-                          </a:rPr>
-                          <m:t>𝜔</m:t>
+                          <a:rPr lang="en-US" altLang="zh-TW" sz="2400" b="0" i="1" dirty="0" smtClean="0">
+                            <a:latin typeface="Cambria Math" panose="02040503050406030204" pitchFamily="18" charset="0"/>
+                          </a:rPr>
+                          <m:t>𝑤</m:t>
                         </m:r>
                       </m:e>
                       <m:sub>
@@ -4093,7 +4088,7 @@
                           <a:rPr lang="en-US" altLang="zh-TW" sz="2400" b="0" i="1" dirty="0" smtClean="0">
                             <a:latin typeface="Cambria Math" panose="02040503050406030204" pitchFamily="18" charset="0"/>
                           </a:rPr>
-                          <m:t>𝜔</m:t>
+                          <m:t>𝑤</m:t>
                         </m:r>
                       </m:e>
                       <m:sub>
@@ -4241,10 +4236,10 @@
                           </m:sSubPr>
                           <m:e>
                             <m:r>
-                              <a:rPr lang="en-US" altLang="zh-TW" sz="2400" i="1">
+                              <a:rPr lang="en-US" altLang="zh-TW" sz="2400" b="0" i="1" smtClean="0">
                                 <a:latin typeface="Cambria Math" panose="02040503050406030204" pitchFamily="18" charset="0"/>
                               </a:rPr>
-                              <m:t>𝜔</m:t>
+                              <m:t>𝑤</m:t>
                             </m:r>
                           </m:e>
                           <m:sub>
@@ -4328,10 +4323,10 @@
                           </m:sSubPr>
                           <m:e>
                             <m:r>
-                              <a:rPr lang="en-US" altLang="zh-TW" sz="2400" i="1">
+                              <a:rPr lang="en-US" altLang="zh-TW" sz="2400" b="0" i="1" smtClean="0">
                                 <a:latin typeface="Cambria Math" panose="02040503050406030204" pitchFamily="18" charset="0"/>
                               </a:rPr>
-                              <m:t>𝜔</m:t>
+                              <m:t>𝑤</m:t>
                             </m:r>
                           </m:e>
                           <m:sub>
@@ -4505,10 +4500,10 @@
                           </m:sSubPr>
                           <m:e>
                             <m:r>
-                              <a:rPr lang="en-US" altLang="zh-TW" sz="2400" i="1">
+                              <a:rPr lang="en-US" altLang="zh-TW" sz="2400" b="0" i="1" smtClean="0">
                                 <a:latin typeface="Cambria Math" panose="02040503050406030204" pitchFamily="18" charset="0"/>
                               </a:rPr>
-                              <m:t>𝜔</m:t>
+                              <m:t>𝑤</m:t>
                             </m:r>
                           </m:e>
                           <m:sub>
@@ -4590,10 +4585,10 @@
                       </m:sSubPr>
                       <m:e>
                         <m:r>
-                          <a:rPr lang="en-US" altLang="zh-TW" sz="2400" i="1">
-                            <a:latin typeface="Cambria Math" panose="02040503050406030204" pitchFamily="18" charset="0"/>
-                          </a:rPr>
-                          <m:t>𝜔</m:t>
+                          <a:rPr lang="en-US" altLang="zh-TW" sz="2400" b="0" i="1" smtClean="0">
+                            <a:latin typeface="Cambria Math" panose="02040503050406030204" pitchFamily="18" charset="0"/>
+                          </a:rPr>
+                          <m:t>𝑤</m:t>
                         </m:r>
                       </m:e>
                       <m:sub>
@@ -4725,10 +4720,10 @@
                       </m:sSubPr>
                       <m:e>
                         <m:r>
-                          <a:rPr lang="en-US" altLang="zh-TW" sz="2000" i="1">
-                            <a:latin typeface="Cambria Math" panose="02040503050406030204" pitchFamily="18" charset="0"/>
-                          </a:rPr>
-                          <m:t>𝜔</m:t>
+                          <a:rPr lang="en-US" altLang="zh-TW" sz="2000" b="0" i="1" smtClean="0">
+                            <a:latin typeface="Cambria Math" panose="02040503050406030204" pitchFamily="18" charset="0"/>
+                          </a:rPr>
+                          <m:t>𝑤</m:t>
                         </m:r>
                       </m:e>
                       <m:sub>
@@ -4796,7 +4791,7 @@
             </p:txBody>
           </p:sp>
         </mc:Choice>
-        <mc:Fallback xmlns="">
+        <mc:Fallback>
           <p:sp>
             <p:nvSpPr>
               <p:cNvPr id="3" name="Content Placeholder 2">
@@ -5787,7 +5782,7 @@
                           <a:rPr lang="en-US" altLang="zh-TW" sz="2400" b="0" i="1" dirty="0" smtClean="0">
                             <a:latin typeface="Cambria Math" panose="02040503050406030204" pitchFamily="18" charset="0"/>
                           </a:rPr>
-                          <m:t>𝜔</m:t>
+                          <m:t>𝑤</m:t>
                         </m:r>
                       </m:e>
                       <m:sub>
@@ -5832,7 +5827,7 @@
                           <a:rPr lang="en-US" altLang="zh-TW" sz="2400" b="0" i="1" dirty="0" smtClean="0">
                             <a:latin typeface="Cambria Math" panose="02040503050406030204" pitchFamily="18" charset="0"/>
                           </a:rPr>
-                          <m:t>𝜔</m:t>
+                          <m:t>𝑤</m:t>
                         </m:r>
                       </m:e>
                       <m:sub>
@@ -7279,7 +7274,7 @@
                           <a:rPr lang="en-US" altLang="zh-TW" sz="2400" b="0" i="1" smtClean="0">
                             <a:latin typeface="Cambria Math" panose="02040503050406030204" pitchFamily="18" charset="0"/>
                           </a:rPr>
-                          <m:t>𝜔</m:t>
+                          <m:t>𝑤</m:t>
                         </m:r>
                       </m:e>
                       <m:sub>
@@ -7335,7 +7330,7 @@
                           <a:rPr lang="en-US" altLang="zh-TW" sz="2400" b="0" i="1" smtClean="0">
                             <a:latin typeface="Cambria Math" panose="02040503050406030204" pitchFamily="18" charset="0"/>
                           </a:rPr>
-                          <m:t>𝜔</m:t>
+                          <m:t>𝑤</m:t>
                         </m:r>
                       </m:e>
                       <m:sub>
@@ -7932,14 +7927,7 @@
                         <a:latin typeface="Cambria Math" panose="02040503050406030204" pitchFamily="18" charset="0"/>
                         <a:ea typeface="Cambria Math" panose="02040503050406030204" pitchFamily="18" charset="0"/>
                       </a:rPr>
-                      <m:t>⟹</m:t>
-                    </m:r>
-                    <m:r>
-                      <a:rPr lang="en-US" altLang="zh-TW" sz="2400" i="1">
-                        <a:latin typeface="Cambria Math" panose="02040503050406030204" pitchFamily="18" charset="0"/>
-                        <a:ea typeface="Cambria Math" panose="02040503050406030204" pitchFamily="18" charset="0"/>
-                      </a:rPr>
-                      <m:t>   </m:t>
+                      <m:t>⟹   </m:t>
                     </m:r>
                     <m:sSubSup>
                       <m:sSubSupPr>
@@ -8958,8 +8946,8 @@
           <a:chExt cx="0" cy="0"/>
         </a:xfrm>
       </p:grpSpPr>
-      <mc:AlternateContent xmlns:mc="http://schemas.openxmlformats.org/markup-compatibility/2006" xmlns:a14="http://schemas.microsoft.com/office/drawing/2010/main">
-        <mc:Choice Requires="a14">
+      <mc:AlternateContent xmlns:mc="http://schemas.openxmlformats.org/markup-compatibility/2006">
+        <mc:Choice xmlns:a14="http://schemas.microsoft.com/office/drawing/2010/main" Requires="a14">
           <p:sp>
             <p:nvSpPr>
               <p:cNvPr id="3" name="Content Placeholder 2">
@@ -9110,7 +9098,7 @@
                       <a:rPr lang="en-US" altLang="zh-TW" sz="2400" b="0" i="1" smtClean="0">
                         <a:latin typeface="Cambria Math" panose="02040503050406030204" pitchFamily="18" charset="0"/>
                       </a:rPr>
-                      <m:t>𝜔</m:t>
+                      <m:t>𝑤</m:t>
                     </m:r>
                     <m:r>
                       <a:rPr lang="en-US" altLang="zh-TW" sz="2400" b="0" i="1" smtClean="0">
@@ -9194,10 +9182,10 @@
                 <a14:m>
                   <m:oMath xmlns:m="http://schemas.openxmlformats.org/officeDocument/2006/math">
                     <m:r>
-                      <a:rPr lang="en-US" altLang="zh-TW" sz="2400" i="1">
+                      <a:rPr lang="en-US" altLang="zh-TW" sz="2400" b="0" i="1" smtClean="0">
                         <a:latin typeface="Cambria Math" panose="02040503050406030204" pitchFamily="18" charset="0"/>
                       </a:rPr>
-                      <m:t>𝜔</m:t>
+                      <m:t>𝑤</m:t>
                     </m:r>
                     <m:r>
                       <a:rPr lang="en-US" altLang="zh-TW" sz="2400" i="1">
@@ -9224,7 +9212,7 @@
             </p:txBody>
           </p:sp>
         </mc:Choice>
-        <mc:Fallback xmlns="">
+        <mc:Fallback>
           <p:sp>
             <p:nvSpPr>
               <p:cNvPr id="3" name="Content Placeholder 2">
@@ -10168,7 +10156,7 @@
                           <a:rPr lang="en-US" altLang="zh-TW" sz="2400" b="0" i="1" dirty="0" smtClean="0">
                             <a:latin typeface="Cambria Math" panose="02040503050406030204" pitchFamily="18" charset="0"/>
                           </a:rPr>
-                          <m:t>𝜔</m:t>
+                          <m:t>𝑤</m:t>
                         </m:r>
                       </m:e>
                       <m:sub>
@@ -10213,7 +10201,7 @@
                           <a:rPr lang="en-US" altLang="zh-TW" sz="2400" b="0" i="1" dirty="0" smtClean="0">
                             <a:latin typeface="Cambria Math" panose="02040503050406030204" pitchFamily="18" charset="0"/>
                           </a:rPr>
-                          <m:t>𝜔</m:t>
+                          <m:t>𝑤</m:t>
                         </m:r>
                       </m:e>
                       <m:sub>
@@ -11129,7 +11117,7 @@
                                         <p:tgtEl>
                                           <p:spTgt spid="3">
                                             <p:txEl>
-                                              <p:pRg st="5" end="5"/>
+                                              <p:pRg st="4" end="4"/>
                                             </p:txEl>
                                           </p:spTgt>
                                         </p:tgtEl>
@@ -11147,7 +11135,7 @@
                                         <p:tgtEl>
                                           <p:spTgt spid="3">
                                             <p:txEl>
-                                              <p:pRg st="5" end="5"/>
+                                              <p:pRg st="4" end="4"/>
                                             </p:txEl>
                                           </p:spTgt>
                                         </p:tgtEl>
@@ -11172,7 +11160,7 @@
                                         <p:tgtEl>
                                           <p:spTgt spid="3">
                                             <p:txEl>
-                                              <p:pRg st="4" end="4"/>
+                                              <p:pRg st="5" end="5"/>
                                             </p:txEl>
                                           </p:spTgt>
                                         </p:tgtEl>
@@ -11190,7 +11178,7 @@
                                         <p:tgtEl>
                                           <p:spTgt spid="3">
                                             <p:txEl>
-                                              <p:pRg st="4" end="4"/>
+                                              <p:pRg st="5" end="5"/>
                                             </p:txEl>
                                           </p:spTgt>
                                         </p:tgtEl>
@@ -11557,7 +11545,7 @@
                           <a:rPr lang="en-US" altLang="zh-TW" sz="2400" b="0" i="1" smtClean="0">
                             <a:latin typeface="Cambria Math" panose="02040503050406030204" pitchFamily="18" charset="0"/>
                           </a:rPr>
-                          <m:t>𝜔</m:t>
+                          <m:t>𝑤</m:t>
                         </m:r>
                       </m:e>
                       <m:sub>
@@ -11613,7 +11601,7 @@
                           <a:rPr lang="en-US" altLang="zh-TW" sz="2400" b="0" i="1" smtClean="0">
                             <a:latin typeface="Cambria Math" panose="02040503050406030204" pitchFamily="18" charset="0"/>
                           </a:rPr>
-                          <m:t>𝜔</m:t>
+                          <m:t>𝑤</m:t>
                         </m:r>
                       </m:e>
                       <m:sub>
@@ -12210,14 +12198,7 @@
                         <a:latin typeface="Cambria Math" panose="02040503050406030204" pitchFamily="18" charset="0"/>
                         <a:ea typeface="Cambria Math" panose="02040503050406030204" pitchFamily="18" charset="0"/>
                       </a:rPr>
-                      <m:t>⟹</m:t>
-                    </m:r>
-                    <m:r>
-                      <a:rPr lang="en-US" altLang="zh-TW" sz="2400" i="1">
-                        <a:latin typeface="Cambria Math" panose="02040503050406030204" pitchFamily="18" charset="0"/>
-                        <a:ea typeface="Cambria Math" panose="02040503050406030204" pitchFamily="18" charset="0"/>
-                      </a:rPr>
-                      <m:t>   </m:t>
+                      <m:t>⟹   </m:t>
                     </m:r>
                     <m:sSubSup>
                       <m:sSubSupPr>
@@ -13248,8 +13229,8 @@
           <a:chExt cx="0" cy="0"/>
         </a:xfrm>
       </p:grpSpPr>
-      <mc:AlternateContent xmlns:mc="http://schemas.openxmlformats.org/markup-compatibility/2006" xmlns:a14="http://schemas.microsoft.com/office/drawing/2010/main">
-        <mc:Choice Requires="a14">
+      <mc:AlternateContent xmlns:mc="http://schemas.openxmlformats.org/markup-compatibility/2006">
+        <mc:Choice xmlns:a14="http://schemas.microsoft.com/office/drawing/2010/main" Requires="a14">
           <p:sp>
             <p:nvSpPr>
               <p:cNvPr id="3" name="Content Placeholder 2">
@@ -13479,7 +13460,7 @@
                           <a:rPr lang="en-US" altLang="zh-TW" sz="2400" b="0" i="1" smtClean="0">
                             <a:latin typeface="Cambria Math" panose="02040503050406030204" pitchFamily="18" charset="0"/>
                           </a:rPr>
-                          <m:t>𝜔</m:t>
+                          <m:t>𝑤</m:t>
                         </m:r>
                       </m:e>
                       <m:sub>
@@ -13879,10 +13860,10 @@
                           </m:sSubPr>
                           <m:e>
                             <m:r>
-                              <a:rPr lang="en-US" altLang="zh-TW" sz="2400" i="1">
+                              <a:rPr lang="en-US" altLang="zh-TW" sz="2400" b="0" i="1" smtClean="0">
                                 <a:latin typeface="Cambria Math" panose="02040503050406030204" pitchFamily="18" charset="0"/>
                               </a:rPr>
-                              <m:t>𝜔</m:t>
+                              <m:t>𝑤</m:t>
                             </m:r>
                           </m:e>
                           <m:sub>
@@ -14178,7 +14159,7 @@
                               <a:rPr lang="en-US" altLang="zh-TW" sz="2400" b="0" i="1" smtClean="0">
                                 <a:latin typeface="Cambria Math" panose="02040503050406030204" pitchFamily="18" charset="0"/>
                               </a:rPr>
-                              <m:t>𝜔</m:t>
+                              <m:t>𝑤</m:t>
                             </m:r>
                           </m:e>
                           <m:sub>
@@ -14331,10 +14312,10 @@
                           </m:sSubPr>
                           <m:e>
                             <m:r>
-                              <a:rPr lang="en-US" altLang="zh-TW" sz="2400" i="1">
+                              <a:rPr lang="en-US" altLang="zh-TW" sz="2400" b="0" i="1" smtClean="0">
                                 <a:latin typeface="Cambria Math" panose="02040503050406030204" pitchFamily="18" charset="0"/>
                               </a:rPr>
-                              <m:t>𝜔</m:t>
+                              <m:t>𝑤</m:t>
                             </m:r>
                           </m:e>
                           <m:sub>
@@ -14627,7 +14608,7 @@
             </p:txBody>
           </p:sp>
         </mc:Choice>
-        <mc:Fallback xmlns="">
+        <mc:Fallback>
           <p:sp>
             <p:nvSpPr>
               <p:cNvPr id="3" name="Content Placeholder 2">
@@ -15371,8 +15352,8 @@
           <a:chExt cx="0" cy="0"/>
         </a:xfrm>
       </p:grpSpPr>
-      <mc:AlternateContent xmlns:mc="http://schemas.openxmlformats.org/markup-compatibility/2006" xmlns:a14="http://schemas.microsoft.com/office/drawing/2010/main">
-        <mc:Choice Requires="a14">
+      <mc:AlternateContent xmlns:mc="http://schemas.openxmlformats.org/markup-compatibility/2006">
+        <mc:Choice xmlns:a14="http://schemas.microsoft.com/office/drawing/2010/main" Requires="a14">
           <p:sp>
             <p:nvSpPr>
               <p:cNvPr id="3" name="Content Placeholder 2">
@@ -15627,10 +15608,10 @@
                           </m:sSubPr>
                           <m:e>
                             <m:r>
-                              <a:rPr lang="en-US" altLang="zh-TW" sz="2400" i="1">
+                              <a:rPr lang="en-US" altLang="zh-TW" sz="2400" b="0" i="1" smtClean="0">
                                 <a:latin typeface="Cambria Math" panose="02040503050406030204" pitchFamily="18" charset="0"/>
                               </a:rPr>
-                              <m:t>𝜔</m:t>
+                              <m:t>𝑤</m:t>
                             </m:r>
                           </m:e>
                           <m:sub>
@@ -15946,10 +15927,10 @@
                           </m:sSubPr>
                           <m:e>
                             <m:r>
-                              <a:rPr lang="en-US" altLang="zh-TW" sz="2400" i="1">
+                              <a:rPr lang="en-US" altLang="zh-TW" sz="2400" b="0" i="1" smtClean="0">
                                 <a:latin typeface="Cambria Math" panose="02040503050406030204" pitchFamily="18" charset="0"/>
                               </a:rPr>
-                              <m:t>𝜔</m:t>
+                              <m:t>𝑤</m:t>
                             </m:r>
                           </m:e>
                           <m:sub>
@@ -16121,10 +16102,10 @@
                           </m:sSubPr>
                           <m:e>
                             <m:r>
-                              <a:rPr lang="en-US" altLang="zh-TW" sz="2400" i="1">
+                              <a:rPr lang="en-US" altLang="zh-TW" sz="2400" b="0" i="1" smtClean="0">
                                 <a:latin typeface="Cambria Math" panose="02040503050406030204" pitchFamily="18" charset="0"/>
                               </a:rPr>
-                              <m:t>𝜔</m:t>
+                              <m:t>𝑤</m:t>
                             </m:r>
                           </m:e>
                           <m:sub>
@@ -16473,7 +16454,7 @@
             </p:txBody>
           </p:sp>
         </mc:Choice>
-        <mc:Fallback xmlns="">
+        <mc:Fallback>
           <p:sp>
             <p:nvSpPr>
               <p:cNvPr id="3" name="Content Placeholder 2">
@@ -17363,8 +17344,8 @@
           <a:chExt cx="0" cy="0"/>
         </a:xfrm>
       </p:grpSpPr>
-      <mc:AlternateContent xmlns:mc="http://schemas.openxmlformats.org/markup-compatibility/2006" xmlns:a14="http://schemas.microsoft.com/office/drawing/2010/main">
-        <mc:Choice Requires="a14">
+      <mc:AlternateContent xmlns:mc="http://schemas.openxmlformats.org/markup-compatibility/2006">
+        <mc:Choice xmlns:a14="http://schemas.microsoft.com/office/drawing/2010/main" Requires="a14">
           <p:sp>
             <p:nvSpPr>
               <p:cNvPr id="3" name="Content Placeholder 2">
@@ -17647,10 +17628,10 @@
                             </m:sSubPr>
                             <m:e>
                               <m:r>
-                                <a:rPr lang="en-US" altLang="zh-TW" sz="2400" i="1" dirty="0">
+                                <a:rPr lang="en-US" altLang="zh-TW" sz="2400" b="0" i="1" dirty="0" smtClean="0">
                                   <a:latin typeface="Cambria Math" panose="02040503050406030204" pitchFamily="18" charset="0"/>
                                 </a:rPr>
-                                <m:t>𝜔</m:t>
+                                <m:t>𝑤</m:t>
                               </m:r>
                             </m:e>
                             <m:sub>
@@ -17703,10 +17684,10 @@
                             </m:sSubPr>
                             <m:e>
                               <m:r>
-                                <a:rPr lang="en-US" altLang="zh-TW" sz="2400" i="1" dirty="0">
+                                <a:rPr lang="en-US" altLang="zh-TW" sz="2400" b="0" i="1" dirty="0" smtClean="0">
                                   <a:latin typeface="Cambria Math" panose="02040503050406030204" pitchFamily="18" charset="0"/>
                                 </a:rPr>
-                                <m:t>𝜔</m:t>
+                                <m:t>𝑤</m:t>
                               </m:r>
                             </m:e>
                             <m:sub>
@@ -18056,10 +18037,10 @@
                         </m:sSubPr>
                         <m:e>
                           <m:r>
-                            <a:rPr lang="en-US" altLang="zh-TW" sz="2400" i="1" dirty="0">
+                            <a:rPr lang="en-US" altLang="zh-TW" sz="2400" b="0" i="1" dirty="0" smtClean="0">
                               <a:latin typeface="Cambria Math" panose="02040503050406030204" pitchFamily="18" charset="0"/>
                             </a:rPr>
-                            <m:t>𝜔</m:t>
+                            <m:t>𝑤</m:t>
                           </m:r>
                         </m:e>
                         <m:sub>
@@ -18318,11 +18299,11 @@
                         </m:sSubPr>
                         <m:e>
                           <m:r>
-                            <a:rPr lang="en-US" altLang="zh-TW" sz="2400" i="1">
+                            <a:rPr lang="en-US" altLang="zh-TW" sz="2400" b="0" i="1" smtClean="0">
                               <a:latin typeface="Cambria Math" panose="02040503050406030204" pitchFamily="18" charset="0"/>
                               <a:ea typeface="Cambria Math" panose="02040503050406030204" pitchFamily="18" charset="0"/>
                             </a:rPr>
-                            <m:t>𝜔</m:t>
+                            <m:t>𝑤</m:t>
                           </m:r>
                         </m:e>
                         <m:sub>
@@ -18361,7 +18342,7 @@
             </p:txBody>
           </p:sp>
         </mc:Choice>
-        <mc:Fallback xmlns="">
+        <mc:Fallback>
           <p:sp>
             <p:nvSpPr>
               <p:cNvPr id="3" name="Content Placeholder 2">
@@ -20562,7 +20543,7 @@
                           <a:rPr lang="en-US" altLang="zh-TW" sz="2400" b="0" i="1" dirty="0" smtClean="0">
                             <a:latin typeface="Cambria Math" panose="02040503050406030204" pitchFamily="18" charset="0"/>
                           </a:rPr>
-                          <m:t>𝜔</m:t>
+                          <m:t>𝑤</m:t>
                         </m:r>
                       </m:e>
                       <m:sub>
@@ -20607,7 +20588,7 @@
                           <a:rPr lang="en-US" altLang="zh-TW" sz="2400" b="0" i="1" dirty="0" smtClean="0">
                             <a:latin typeface="Cambria Math" panose="02040503050406030204" pitchFamily="18" charset="0"/>
                           </a:rPr>
-                          <m:t>𝜔</m:t>
+                          <m:t>𝑤</m:t>
                         </m:r>
                       </m:e>
                       <m:sub>
@@ -21970,7 +21951,7 @@
                           <a:rPr lang="en-US" altLang="zh-TW" sz="2400" b="0" i="1" smtClean="0">
                             <a:latin typeface="Cambria Math" panose="02040503050406030204" pitchFamily="18" charset="0"/>
                           </a:rPr>
-                          <m:t>𝜔</m:t>
+                          <m:t>𝑤</m:t>
                         </m:r>
                       </m:e>
                       <m:sub>
@@ -22026,7 +22007,7 @@
                           <a:rPr lang="en-US" altLang="zh-TW" sz="2400" b="0" i="1" smtClean="0">
                             <a:latin typeface="Cambria Math" panose="02040503050406030204" pitchFamily="18" charset="0"/>
                           </a:rPr>
-                          <m:t>𝜔</m:t>
+                          <m:t>𝑤</m:t>
                         </m:r>
                       </m:e>
                       <m:sub>
@@ -22638,13 +22619,7 @@
                           <a:rPr lang="en-US" altLang="zh-TW" sz="2400" i="1">
                             <a:latin typeface="Cambria Math" panose="02040503050406030204" pitchFamily="18" charset="0"/>
                           </a:rPr>
-                          <m:t>𝜕</m:t>
-                        </m:r>
-                        <m:r>
-                          <a:rPr lang="en-US" altLang="zh-TW" sz="2400" i="1">
-                            <a:latin typeface="Cambria Math" panose="02040503050406030204" pitchFamily="18" charset="0"/>
-                          </a:rPr>
-                          <m:t>𝜋</m:t>
+                          <m:t>𝜕𝜋</m:t>
                         </m:r>
                       </m:num>
                       <m:den>
@@ -22685,19 +22660,7 @@
                       <a:rPr lang="en-US" altLang="zh-TW" sz="2400" i="1">
                         <a:latin typeface="Cambria Math" panose="02040503050406030204" pitchFamily="18" charset="0"/>
                       </a:rPr>
-                      <m:t>=</m:t>
-                    </m:r>
-                    <m:r>
-                      <a:rPr lang="en-US" altLang="zh-TW" sz="2400" i="1">
-                        <a:latin typeface="Cambria Math" panose="02040503050406030204" pitchFamily="18" charset="0"/>
-                      </a:rPr>
-                      <m:t>0</m:t>
-                    </m:r>
-                    <m:r>
-                      <a:rPr lang="en-US" altLang="zh-TW" sz="2400" i="1">
-                        <a:latin typeface="Cambria Math" panose="02040503050406030204" pitchFamily="18" charset="0"/>
-                      </a:rPr>
-                      <m:t>   </m:t>
+                      <m:t>=0   </m:t>
                     </m:r>
                     <m:r>
                       <a:rPr lang="en-US" altLang="zh-TW" sz="2400" i="1">
@@ -23691,8 +23654,8 @@
           <a:chExt cx="0" cy="0"/>
         </a:xfrm>
       </p:grpSpPr>
-      <mc:AlternateContent xmlns:mc="http://schemas.openxmlformats.org/markup-compatibility/2006" xmlns:a14="http://schemas.microsoft.com/office/drawing/2010/main">
-        <mc:Choice Requires="a14">
+      <mc:AlternateContent xmlns:mc="http://schemas.openxmlformats.org/markup-compatibility/2006">
+        <mc:Choice xmlns:a14="http://schemas.microsoft.com/office/drawing/2010/main" Requires="a14">
           <p:sp>
             <p:nvSpPr>
               <p:cNvPr id="3" name="Content Placeholder 2">
@@ -23985,10 +23948,10 @@
                             </m:sSubPr>
                             <m:e>
                               <m:r>
-                                <a:rPr lang="en-US" altLang="zh-TW" sz="2400" i="1" dirty="0">
+                                <a:rPr lang="en-US" altLang="zh-TW" sz="2400" b="0" i="1" dirty="0" smtClean="0">
                                   <a:latin typeface="Cambria Math" panose="02040503050406030204" pitchFamily="18" charset="0"/>
                                 </a:rPr>
-                                <m:t>𝜔</m:t>
+                                <m:t>𝑤</m:t>
                               </m:r>
                             </m:e>
                             <m:sub>
@@ -24041,10 +24004,10 @@
                             </m:sSubPr>
                             <m:e>
                               <m:r>
-                                <a:rPr lang="en-US" altLang="zh-TW" sz="2400" i="1" dirty="0">
+                                <a:rPr lang="en-US" altLang="zh-TW" sz="2400" b="0" i="1" dirty="0" smtClean="0">
                                   <a:latin typeface="Cambria Math" panose="02040503050406030204" pitchFamily="18" charset="0"/>
                                 </a:rPr>
-                                <m:t>𝜔</m:t>
+                                <m:t>𝑤</m:t>
                               </m:r>
                             </m:e>
                             <m:sub>
@@ -24317,7 +24280,7 @@
                           <a:rPr lang="en-US" altLang="zh-TW" sz="2400" b="0" i="1" smtClean="0">
                             <a:latin typeface="Cambria Math" panose="02040503050406030204" pitchFamily="18" charset="0"/>
                           </a:rPr>
-                          <m:t>𝜔</m:t>
+                          <m:t>𝑤</m:t>
                         </m:r>
                       </m:e>
                       <m:sub>
@@ -24529,10 +24492,10 @@
                       </m:sSubPr>
                       <m:e>
                         <m:r>
-                          <a:rPr lang="en-US" altLang="zh-TW" sz="2400" i="1">
-                            <a:latin typeface="Cambria Math" panose="02040503050406030204" pitchFamily="18" charset="0"/>
-                          </a:rPr>
-                          <m:t>𝜔</m:t>
+                          <a:rPr lang="en-US" altLang="zh-TW" sz="2400" b="0" i="1" smtClean="0">
+                            <a:latin typeface="Cambria Math" panose="02040503050406030204" pitchFamily="18" charset="0"/>
+                          </a:rPr>
+                          <m:t>𝑤</m:t>
                         </m:r>
                       </m:e>
                       <m:sub>
@@ -24656,10 +24619,10 @@
                           </m:sSubPr>
                           <m:e>
                             <m:r>
-                              <a:rPr lang="en-US" altLang="zh-TW" sz="2400" i="1">
+                              <a:rPr lang="en-US" altLang="zh-TW" sz="2400" b="0" i="1" smtClean="0">
                                 <a:latin typeface="Cambria Math" panose="02040503050406030204" pitchFamily="18" charset="0"/>
                               </a:rPr>
-                              <m:t>𝜔</m:t>
+                              <m:t>𝑤</m:t>
                             </m:r>
                           </m:e>
                           <m:sub>
@@ -24698,7 +24661,7 @@
             </p:txBody>
           </p:sp>
         </mc:Choice>
-        <mc:Fallback xmlns="">
+        <mc:Fallback>
           <p:sp>
             <p:nvSpPr>
               <p:cNvPr id="3" name="Content Placeholder 2">
@@ -25356,8 +25319,8 @@
           <a:chExt cx="0" cy="0"/>
         </a:xfrm>
       </p:grpSpPr>
-      <mc:AlternateContent xmlns:mc="http://schemas.openxmlformats.org/markup-compatibility/2006" xmlns:a14="http://schemas.microsoft.com/office/drawing/2010/main">
-        <mc:Choice Requires="a14">
+      <mc:AlternateContent xmlns:mc="http://schemas.openxmlformats.org/markup-compatibility/2006">
+        <mc:Choice xmlns:a14="http://schemas.microsoft.com/office/drawing/2010/main" Requires="a14">
           <p:sp>
             <p:nvSpPr>
               <p:cNvPr id="3" name="Content Placeholder 2">
@@ -25527,10 +25490,10 @@
                           </m:sSubPr>
                           <m:e>
                             <m:r>
-                              <a:rPr lang="en-US" altLang="zh-TW" sz="2400" i="1">
+                              <a:rPr lang="en-US" altLang="zh-TW" sz="2400" b="0" i="1" smtClean="0">
                                 <a:latin typeface="Cambria Math" panose="02040503050406030204" pitchFamily="18" charset="0"/>
                               </a:rPr>
-                              <m:t>𝜔</m:t>
+                              <m:t>𝑤</m:t>
                             </m:r>
                           </m:e>
                           <m:sub>
@@ -25691,10 +25654,10 @@
                                   </m:sSubPr>
                                   <m:e>
                                     <m:r>
-                                      <a:rPr lang="en-US" altLang="zh-TW" sz="2400" i="1">
+                                      <a:rPr lang="en-US" altLang="zh-TW" sz="2400" b="0" i="1" smtClean="0">
                                         <a:latin typeface="Cambria Math" panose="02040503050406030204" pitchFamily="18" charset="0"/>
                                       </a:rPr>
-                                      <m:t>𝜔</m:t>
+                                      <m:t>𝑤</m:t>
                                     </m:r>
                                   </m:e>
                                   <m:sub>
@@ -25769,10 +25732,10 @@
                                   </m:sSubPr>
                                   <m:e>
                                     <m:r>
-                                      <a:rPr lang="en-US" altLang="zh-TW" sz="2400" i="1">
+                                      <a:rPr lang="en-US" altLang="zh-TW" sz="2400" b="0" i="1" smtClean="0">
                                         <a:latin typeface="Cambria Math" panose="02040503050406030204" pitchFamily="18" charset="0"/>
                                       </a:rPr>
-                                      <m:t>𝜔</m:t>
+                                      <m:t>𝑤</m:t>
                                     </m:r>
                                   </m:e>
                                   <m:sub>
@@ -25878,10 +25841,10 @@
                                   </m:sSubPr>
                                   <m:e>
                                     <m:r>
-                                      <a:rPr lang="en-US" altLang="zh-TW" sz="2400" i="1">
+                                      <a:rPr lang="en-US" altLang="zh-TW" sz="2400" b="0" i="1" smtClean="0">
                                         <a:latin typeface="Cambria Math" panose="02040503050406030204" pitchFamily="18" charset="0"/>
                                       </a:rPr>
-                                      <m:t>𝜔</m:t>
+                                      <m:t>𝑤</m:t>
                                     </m:r>
                                   </m:e>
                                   <m:sub>
@@ -25956,10 +25919,10 @@
                                   </m:sSubPr>
                                   <m:e>
                                     <m:r>
-                                      <a:rPr lang="en-US" altLang="zh-TW" sz="2400" i="1">
+                                      <a:rPr lang="en-US" altLang="zh-TW" sz="2400" b="0" i="1" smtClean="0">
                                         <a:latin typeface="Cambria Math" panose="02040503050406030204" pitchFamily="18" charset="0"/>
                                       </a:rPr>
-                                      <m:t>𝜔</m:t>
+                                      <m:t>𝑤</m:t>
                                     </m:r>
                                   </m:e>
                                   <m:sub>
@@ -26176,10 +26139,10 @@
                                   </m:sSubPr>
                                   <m:e>
                                     <m:r>
-                                      <a:rPr lang="en-US" altLang="zh-TW" sz="2400" i="1">
+                                      <a:rPr lang="en-US" altLang="zh-TW" sz="2400" b="0" i="1" smtClean="0">
                                         <a:latin typeface="Cambria Math" panose="02040503050406030204" pitchFamily="18" charset="0"/>
                                       </a:rPr>
-                                      <m:t>𝜔</m:t>
+                                      <m:t>𝑤</m:t>
                                     </m:r>
                                   </m:e>
                                   <m:sub>
@@ -26254,10 +26217,10 @@
                                   </m:sSubPr>
                                   <m:e>
                                     <m:r>
-                                      <a:rPr lang="en-US" altLang="zh-TW" sz="2400" i="1">
+                                      <a:rPr lang="en-US" altLang="zh-TW" sz="2400" b="0" i="1" smtClean="0">
                                         <a:latin typeface="Cambria Math" panose="02040503050406030204" pitchFamily="18" charset="0"/>
                                       </a:rPr>
-                                      <m:t>𝜔</m:t>
+                                      <m:t>𝑤</m:t>
                                     </m:r>
                                   </m:e>
                                   <m:sub>
@@ -26405,10 +26368,10 @@
                                           </m:sSubPr>
                                           <m:e>
                                             <m:r>
-                                              <a:rPr lang="en-US" altLang="zh-TW" sz="2400" i="1">
+                                              <a:rPr lang="en-US" altLang="zh-TW" sz="2400" b="0" i="1" smtClean="0">
                                                 <a:latin typeface="Cambria Math" panose="02040503050406030204" pitchFamily="18" charset="0"/>
                                               </a:rPr>
-                                              <m:t>𝜔</m:t>
+                                              <m:t>𝑤</m:t>
                                             </m:r>
                                           </m:e>
                                           <m:sub>
@@ -26483,10 +26446,10 @@
                                           </m:sSubPr>
                                           <m:e>
                                             <m:r>
-                                              <a:rPr lang="en-US" altLang="zh-TW" sz="2400" i="1">
+                                              <a:rPr lang="en-US" altLang="zh-TW" sz="2400" b="0" i="1" smtClean="0">
                                                 <a:latin typeface="Cambria Math" panose="02040503050406030204" pitchFamily="18" charset="0"/>
                                               </a:rPr>
-                                              <m:t>𝜔</m:t>
+                                              <m:t>𝑤</m:t>
                                             </m:r>
                                           </m:e>
                                           <m:sub>
@@ -26601,7 +26564,7 @@
             </p:txBody>
           </p:sp>
         </mc:Choice>
-        <mc:Fallback xmlns="">
+        <mc:Fallback>
           <p:sp>
             <p:nvSpPr>
               <p:cNvPr id="3" name="Content Placeholder 2">
@@ -27241,8 +27204,8 @@
           <a:chExt cx="0" cy="0"/>
         </a:xfrm>
       </p:grpSpPr>
-      <mc:AlternateContent xmlns:mc="http://schemas.openxmlformats.org/markup-compatibility/2006" xmlns:a14="http://schemas.microsoft.com/office/drawing/2010/main">
-        <mc:Choice Requires="a14">
+      <mc:AlternateContent xmlns:mc="http://schemas.openxmlformats.org/markup-compatibility/2006">
+        <mc:Choice xmlns:a14="http://schemas.microsoft.com/office/drawing/2010/main" Requires="a14">
           <p:sp>
             <p:nvSpPr>
               <p:cNvPr id="3" name="Content Placeholder 2">
@@ -27401,10 +27364,10 @@
                                           </m:sSubPr>
                                           <m:e>
                                             <m:r>
-                                              <a:rPr lang="en-US" altLang="zh-TW" sz="2400" i="1">
+                                              <a:rPr lang="en-US" altLang="zh-TW" sz="2400" b="0" i="1" smtClean="0">
                                                 <a:latin typeface="Cambria Math" panose="02040503050406030204" pitchFamily="18" charset="0"/>
                                               </a:rPr>
-                                              <m:t>𝜔</m:t>
+                                              <m:t>𝑤</m:t>
                                             </m:r>
                                           </m:e>
                                           <m:sub>
@@ -27479,10 +27442,10 @@
                                           </m:sSubPr>
                                           <m:e>
                                             <m:r>
-                                              <a:rPr lang="en-US" altLang="zh-TW" sz="2400" i="1">
+                                              <a:rPr lang="en-US" altLang="zh-TW" sz="2400" b="0" i="1" smtClean="0">
                                                 <a:latin typeface="Cambria Math" panose="02040503050406030204" pitchFamily="18" charset="0"/>
                                               </a:rPr>
-                                              <m:t>𝜔</m:t>
+                                              <m:t>𝑤</m:t>
                                             </m:r>
                                           </m:e>
                                           <m:sub>
@@ -27724,7 +27687,7 @@
             </p:txBody>
           </p:sp>
         </mc:Choice>
-        <mc:Fallback xmlns="">
+        <mc:Fallback>
           <p:sp>
             <p:nvSpPr>
               <p:cNvPr id="3" name="Content Placeholder 2">
@@ -28411,8 +28374,8 @@
           <a:chExt cx="0" cy="0"/>
         </a:xfrm>
       </p:grpSpPr>
-      <mc:AlternateContent xmlns:mc="http://schemas.openxmlformats.org/markup-compatibility/2006" xmlns:a14="http://schemas.microsoft.com/office/drawing/2010/main">
-        <mc:Choice Requires="a14">
+      <mc:AlternateContent xmlns:mc="http://schemas.openxmlformats.org/markup-compatibility/2006">
+        <mc:Choice xmlns:a14="http://schemas.microsoft.com/office/drawing/2010/main" Requires="a14">
           <p:sp>
             <p:nvSpPr>
               <p:cNvPr id="3" name="Content Placeholder 2">
@@ -28615,7 +28578,7 @@
                             <a:rPr lang="en-US" altLang="zh-TW" sz="2400" b="0" i="1" smtClean="0">
                               <a:latin typeface="Cambria Math" panose="02040503050406030204" pitchFamily="18" charset="0"/>
                             </a:rPr>
-                            <m:t>𝜔</m:t>
+                            <m:t>𝑤</m:t>
                           </m:r>
                         </m:e>
                         <m:sub>
@@ -28671,7 +28634,7 @@
                             <a:rPr lang="en-US" altLang="zh-TW" sz="2400" b="0" i="1" smtClean="0">
                               <a:latin typeface="Cambria Math" panose="02040503050406030204" pitchFamily="18" charset="0"/>
                             </a:rPr>
-                            <m:t>𝜔</m:t>
+                            <m:t>𝑤</m:t>
                           </m:r>
                         </m:e>
                         <m:sub>
@@ -29038,10 +29001,10 @@
                         </m:sSubPr>
                         <m:e>
                           <m:r>
-                            <a:rPr lang="en-US" altLang="zh-TW" sz="2400" i="1" dirty="0">
+                            <a:rPr lang="en-US" altLang="zh-TW" sz="2400" b="0" i="1" dirty="0" smtClean="0">
                               <a:latin typeface="Cambria Math" panose="02040503050406030204" pitchFamily="18" charset="0"/>
                             </a:rPr>
-                            <m:t>𝜔</m:t>
+                            <m:t>𝑤</m:t>
                           </m:r>
                         </m:e>
                         <m:sub>
@@ -29247,7 +29210,7 @@
             </p:txBody>
           </p:sp>
         </mc:Choice>
-        <mc:Fallback xmlns="">
+        <mc:Fallback>
           <p:sp>
             <p:nvSpPr>
               <p:cNvPr id="3" name="Content Placeholder 2">
@@ -29973,8 +29936,8 @@
           <a:chExt cx="0" cy="0"/>
         </a:xfrm>
       </p:grpSpPr>
-      <mc:AlternateContent xmlns:mc="http://schemas.openxmlformats.org/markup-compatibility/2006" xmlns:a14="http://schemas.microsoft.com/office/drawing/2010/main">
-        <mc:Choice Requires="a14">
+      <mc:AlternateContent xmlns:mc="http://schemas.openxmlformats.org/markup-compatibility/2006">
+        <mc:Choice xmlns:a14="http://schemas.microsoft.com/office/drawing/2010/main" Requires="a14">
           <p:sp>
             <p:nvSpPr>
               <p:cNvPr id="3" name="Content Placeholder 2">
@@ -30115,10 +30078,10 @@
                         </m:sSubPr>
                         <m:e>
                           <m:r>
-                            <a:rPr lang="en-US" altLang="zh-TW" sz="2400" i="1" dirty="0">
+                            <a:rPr lang="en-US" altLang="zh-TW" sz="2400" b="0" i="1" dirty="0" smtClean="0">
                               <a:latin typeface="Cambria Math" panose="02040503050406030204" pitchFamily="18" charset="0"/>
                             </a:rPr>
-                            <m:t>𝜔</m:t>
+                            <m:t>𝑤</m:t>
                           </m:r>
                         </m:e>
                         <m:sub>
@@ -30171,10 +30134,10 @@
                         </m:sSubPr>
                         <m:e>
                           <m:r>
-                            <a:rPr lang="en-US" altLang="zh-TW" sz="2400" i="1" dirty="0">
+                            <a:rPr lang="en-US" altLang="zh-TW" sz="2400" b="0" i="1" dirty="0" smtClean="0">
                               <a:latin typeface="Cambria Math" panose="02040503050406030204" pitchFamily="18" charset="0"/>
                             </a:rPr>
-                            <m:t>𝜔</m:t>
+                            <m:t>𝑤</m:t>
                           </m:r>
                         </m:e>
                         <m:sub>
@@ -30380,7 +30343,7 @@
                           <a:rPr lang="en-US" altLang="zh-TW" sz="2000" b="0" i="1" smtClean="0">
                             <a:latin typeface="Cambria Math" panose="02040503050406030204" pitchFamily="18" charset="0"/>
                           </a:rPr>
-                          <m:t>𝜔</m:t>
+                          <m:t>𝑤</m:t>
                         </m:r>
                       </m:e>
                       <m:sub>
@@ -30642,7 +30605,7 @@
                               <a:rPr lang="en-US" altLang="zh-TW" sz="2000" b="0" i="1" smtClean="0">
                                 <a:latin typeface="Cambria Math" panose="02040503050406030204" pitchFamily="18" charset="0"/>
                               </a:rPr>
-                              <m:t>𝜔</m:t>
+                              <m:t>𝑤</m:t>
                             </m:r>
                           </m:e>
                           <m:sub>
@@ -30681,7 +30644,7 @@
             </p:txBody>
           </p:sp>
         </mc:Choice>
-        <mc:Fallback xmlns="">
+        <mc:Fallback>
           <p:sp>
             <p:nvSpPr>
               <p:cNvPr id="3" name="Content Placeholder 2">
@@ -31425,8 +31388,8 @@
           <a:chExt cx="0" cy="0"/>
         </a:xfrm>
       </p:grpSpPr>
-      <mc:AlternateContent xmlns:mc="http://schemas.openxmlformats.org/markup-compatibility/2006" xmlns:a14="http://schemas.microsoft.com/office/drawing/2010/main">
-        <mc:Choice Requires="a14">
+      <mc:AlternateContent xmlns:mc="http://schemas.openxmlformats.org/markup-compatibility/2006">
+        <mc:Choice xmlns:a14="http://schemas.microsoft.com/office/drawing/2010/main" Requires="a14">
           <p:sp>
             <p:nvSpPr>
               <p:cNvPr id="3" name="Content Placeholder 2">
@@ -31747,7 +31710,7 @@
                           <a:rPr lang="en-US" altLang="zh-TW" sz="2400" b="0" i="1" smtClean="0">
                             <a:latin typeface="Cambria Math" panose="02040503050406030204" pitchFamily="18" charset="0"/>
                           </a:rPr>
-                          <m:t>𝜔</m:t>
+                          <m:t>𝑤</m:t>
                         </m:r>
                       </m:e>
                     </m:d>
@@ -31761,7 +31724,7 @@
             </p:txBody>
           </p:sp>
         </mc:Choice>
-        <mc:Fallback xmlns="">
+        <mc:Fallback>
           <p:sp>
             <p:nvSpPr>
               <p:cNvPr id="3" name="Content Placeholder 2">
@@ -34018,8 +33981,8 @@
           <a:chExt cx="0" cy="0"/>
         </a:xfrm>
       </p:grpSpPr>
-      <mc:AlternateContent xmlns:mc="http://schemas.openxmlformats.org/markup-compatibility/2006" xmlns:a14="http://schemas.microsoft.com/office/drawing/2010/main">
-        <mc:Choice Requires="a14">
+      <mc:AlternateContent xmlns:mc="http://schemas.openxmlformats.org/markup-compatibility/2006">
+        <mc:Choice xmlns:a14="http://schemas.microsoft.com/office/drawing/2010/main" Requires="a14">
           <p:sp>
             <p:nvSpPr>
               <p:cNvPr id="3" name="Content Placeholder 2">
@@ -34579,7 +34542,7 @@
                           <a:rPr lang="en-US" altLang="zh-TW" sz="2000" b="0" i="1" dirty="0" smtClean="0">
                             <a:latin typeface="Cambria Math" panose="02040503050406030204" pitchFamily="18" charset="0"/>
                           </a:rPr>
-                          <m:t>𝜔</m:t>
+                          <m:t>𝑤</m:t>
                         </m:r>
                       </m:e>
                       <m:sub>
@@ -34607,10 +34570,10 @@
                       </m:sSubPr>
                       <m:e>
                         <m:r>
-                          <a:rPr lang="en-US" altLang="zh-TW" sz="2000" i="1" dirty="0">
-                            <a:latin typeface="Cambria Math" panose="02040503050406030204" pitchFamily="18" charset="0"/>
-                          </a:rPr>
-                          <m:t>𝜔</m:t>
+                          <a:rPr lang="en-US" altLang="zh-TW" sz="2000" b="0" i="1" dirty="0" smtClean="0">
+                            <a:latin typeface="Cambria Math" panose="02040503050406030204" pitchFamily="18" charset="0"/>
+                          </a:rPr>
+                          <m:t>𝑤</m:t>
                         </m:r>
                       </m:e>
                       <m:sub>
@@ -34880,10 +34843,10 @@
                                     </m:sSubPr>
                                     <m:e>
                                       <m:r>
-                                        <a:rPr lang="en-US" altLang="zh-TW" sz="2000" i="1">
+                                        <a:rPr lang="en-US" altLang="zh-TW" sz="2000" b="0" i="1" smtClean="0">
                                           <a:latin typeface="Cambria Math" panose="02040503050406030204" pitchFamily="18" charset="0"/>
                                         </a:rPr>
-                                        <m:t>𝜔</m:t>
+                                        <m:t>𝑤</m:t>
                                       </m:r>
                                     </m:e>
                                     <m:sub>
@@ -34985,7 +34948,7 @@
             </p:txBody>
           </p:sp>
         </mc:Choice>
-        <mc:Fallback xmlns="">
+        <mc:Fallback>
           <p:sp>
             <p:nvSpPr>
               <p:cNvPr id="3" name="Content Placeholder 2">
@@ -35686,8 +35649,8 @@
           <a:chExt cx="0" cy="0"/>
         </a:xfrm>
       </p:grpSpPr>
-      <mc:AlternateContent xmlns:mc="http://schemas.openxmlformats.org/markup-compatibility/2006" xmlns:a14="http://schemas.microsoft.com/office/drawing/2010/main">
-        <mc:Choice Requires="a14">
+      <mc:AlternateContent xmlns:mc="http://schemas.openxmlformats.org/markup-compatibility/2006">
+        <mc:Choice xmlns:a14="http://schemas.microsoft.com/office/drawing/2010/main" Requires="a14">
           <p:sp>
             <p:nvSpPr>
               <p:cNvPr id="3" name="Content Placeholder 2">
@@ -36091,10 +36054,10 @@
                                     </m:sSubPr>
                                     <m:e>
                                       <m:r>
-                                        <a:rPr lang="en-US" altLang="zh-TW" sz="2400" i="1" dirty="0">
+                                        <a:rPr lang="en-US" altLang="zh-TW" sz="2400" b="0" i="1" dirty="0" smtClean="0">
                                           <a:latin typeface="Cambria Math" panose="02040503050406030204" pitchFamily="18" charset="0"/>
                                         </a:rPr>
-                                        <m:t>𝜔</m:t>
+                                        <m:t>𝑤</m:t>
                                       </m:r>
                                     </m:e>
                                     <m:sub>
@@ -36147,10 +36110,10 @@
                                     </m:sSubPr>
                                     <m:e>
                                       <m:r>
-                                        <a:rPr lang="en-US" altLang="zh-TW" sz="2400" i="1" dirty="0">
+                                        <a:rPr lang="en-US" altLang="zh-TW" sz="2400" b="0" i="1" dirty="0" smtClean="0">
                                           <a:latin typeface="Cambria Math" panose="02040503050406030204" pitchFamily="18" charset="0"/>
                                         </a:rPr>
-                                        <m:t>𝜔</m:t>
+                                        <m:t>𝑤</m:t>
                                       </m:r>
                                     </m:e>
                                     <m:sub>
@@ -36531,7 +36494,7 @@
                           <a:rPr lang="en-US" altLang="zh-TW" sz="2400" b="0" i="1" dirty="0" smtClean="0">
                             <a:latin typeface="Cambria Math" panose="02040503050406030204" pitchFamily="18" charset="0"/>
                           </a:rPr>
-                          <m:t>𝜔</m:t>
+                          <m:t>𝑤</m:t>
                         </m:r>
                       </m:e>
                       <m:sub>
@@ -36664,7 +36627,7 @@
                             <a:latin typeface="Cambria Math" panose="02040503050406030204" pitchFamily="18" charset="0"/>
                             <a:ea typeface="Cambria Math" panose="02040503050406030204" pitchFamily="18" charset="0"/>
                           </a:rPr>
-                          <m:t>𝜔</m:t>
+                          <m:t>𝑤</m:t>
                         </m:r>
                       </m:e>
                       <m:sub>
@@ -36810,11 +36773,11 @@
                           </m:sSubPr>
                           <m:e>
                             <m:r>
-                              <a:rPr lang="en-US" altLang="zh-TW" sz="2400" i="1">
+                              <a:rPr lang="en-US" altLang="zh-TW" sz="2400" b="0" i="1" smtClean="0">
                                 <a:latin typeface="Cambria Math" panose="02040503050406030204" pitchFamily="18" charset="0"/>
                                 <a:ea typeface="Cambria Math" panose="02040503050406030204" pitchFamily="18" charset="0"/>
                               </a:rPr>
-                              <m:t>𝜔</m:t>
+                              <m:t>𝑤</m:t>
                             </m:r>
                           </m:e>
                           <m:sub>
@@ -36839,7 +36802,7 @@
             </p:txBody>
           </p:sp>
         </mc:Choice>
-        <mc:Fallback xmlns="">
+        <mc:Fallback>
           <p:sp>
             <p:nvSpPr>
               <p:cNvPr id="3" name="Content Placeholder 2">
@@ -37815,8 +37778,8 @@
           <a:chExt cx="0" cy="0"/>
         </a:xfrm>
       </p:grpSpPr>
-      <mc:AlternateContent xmlns:mc="http://schemas.openxmlformats.org/markup-compatibility/2006" xmlns:a14="http://schemas.microsoft.com/office/drawing/2010/main">
-        <mc:Choice Requires="a14">
+      <mc:AlternateContent xmlns:mc="http://schemas.openxmlformats.org/markup-compatibility/2006">
+        <mc:Choice xmlns:a14="http://schemas.microsoft.com/office/drawing/2010/main" Requires="a14">
           <p:sp>
             <p:nvSpPr>
               <p:cNvPr id="3" name="Content Placeholder 2">
@@ -38154,10 +38117,10 @@
                       </m:sSubPr>
                       <m:e>
                         <m:r>
-                          <a:rPr lang="en-US" altLang="zh-TW" sz="2000" i="1" dirty="0" smtClean="0">
-                            <a:latin typeface="Cambria Math" panose="02040503050406030204" pitchFamily="18" charset="0"/>
-                          </a:rPr>
-                          <m:t>𝜔</m:t>
+                          <a:rPr lang="en-US" altLang="zh-TW" sz="2000" b="0" i="1" dirty="0" smtClean="0">
+                            <a:latin typeface="Cambria Math" panose="02040503050406030204" pitchFamily="18" charset="0"/>
+                          </a:rPr>
+                          <m:t>𝑤</m:t>
                         </m:r>
                       </m:e>
                       <m:sub>
@@ -38326,10 +38289,10 @@
                       </m:sSubPr>
                       <m:e>
                         <m:r>
-                          <a:rPr lang="en-US" altLang="zh-TW" sz="2400" i="1" dirty="0">
-                            <a:latin typeface="Cambria Math" panose="02040503050406030204" pitchFamily="18" charset="0"/>
-                          </a:rPr>
-                          <m:t>𝜔</m:t>
+                          <a:rPr lang="en-US" altLang="zh-TW" sz="2400" b="0" i="1" dirty="0" smtClean="0">
+                            <a:latin typeface="Cambria Math" panose="02040503050406030204" pitchFamily="18" charset="0"/>
+                          </a:rPr>
+                          <m:t>𝑤</m:t>
                         </m:r>
                       </m:e>
                       <m:sub>
@@ -38517,10 +38480,10 @@
                       </m:sSubPr>
                       <m:e>
                         <m:r>
-                          <a:rPr lang="en-US" altLang="zh-TW" sz="2400" i="1" dirty="0">
-                            <a:latin typeface="Cambria Math" panose="02040503050406030204" pitchFamily="18" charset="0"/>
-                          </a:rPr>
-                          <m:t>𝜔</m:t>
+                          <a:rPr lang="en-US" altLang="zh-TW" sz="2400" b="0" i="1" dirty="0" smtClean="0">
+                            <a:latin typeface="Cambria Math" panose="02040503050406030204" pitchFamily="18" charset="0"/>
+                          </a:rPr>
+                          <m:t>𝑤</m:t>
                         </m:r>
                       </m:e>
                       <m:sub>
@@ -38677,7 +38640,7 @@
                           <a:rPr lang="en-US" altLang="zh-TW" sz="2400" b="0" i="1" smtClean="0">
                             <a:latin typeface="Cambria Math" panose="02040503050406030204" pitchFamily="18" charset="0"/>
                           </a:rPr>
-                          <m:t>𝜔</m:t>
+                          <m:t>𝑤</m:t>
                         </m:r>
                       </m:e>
                       <m:sub>
@@ -38699,7 +38662,7 @@
             </p:txBody>
           </p:sp>
         </mc:Choice>
-        <mc:Fallback xmlns="">
+        <mc:Fallback>
           <p:sp>
             <p:nvSpPr>
               <p:cNvPr id="3" name="Content Placeholder 2">
